--- a/01 Classes/Aula 01. 2 Desenvolvimento de Software  Java - Estilos Arquiteturais Padrões de Projetos OO e UML.pptx
+++ b/01 Classes/Aula 01. 2 Desenvolvimento de Software  Java - Estilos Arquiteturais Padrões de Projetos OO e UML.pptx
@@ -4426,7 +4426,7 @@
               <a:buChar char="§"/>
             </a:pPr>
             <a:r>
-              <a:rPr lang="pt-BR" sz="2400" dirty="0" err="1">
+              <a:rPr lang="pt-BR" sz="2400" b="1" dirty="0" err="1">
                 <a:solidFill>
                   <a:schemeClr val="tx1"/>
                 </a:solidFill>
@@ -4541,36 +4541,79 @@
               <a:t>Níveis de Visibilidade: </a:t>
             </a:r>
             <a:r>
-              <a:rPr lang="pt-BR" sz="2400" dirty="0" err="1">
-                <a:solidFill>
-                  <a:schemeClr val="tx1"/>
-                </a:solidFill>
-                <a:latin typeface="Times New Roman" panose="02020603050405020304" pitchFamily="18" charset="0"/>
-                <a:cs typeface="Times New Roman" panose="02020603050405020304" pitchFamily="18" charset="0"/>
-              </a:rPr>
-              <a:t>Public</a:t>
-            </a:r>
-            <a:r>
-              <a:rPr lang="pt-BR" sz="2400" dirty="0">
-                <a:solidFill>
-                  <a:schemeClr val="tx1"/>
-                </a:solidFill>
-                <a:latin typeface="Times New Roman" panose="02020603050405020304" pitchFamily="18" charset="0"/>
-                <a:cs typeface="Times New Roman" panose="02020603050405020304" pitchFamily="18" charset="0"/>
-              </a:rPr>
-              <a:t>; Private; </a:t>
-            </a:r>
-            <a:r>
-              <a:rPr lang="pt-BR" sz="2400" dirty="0" err="1">
-                <a:solidFill>
-                  <a:schemeClr val="tx1"/>
-                </a:solidFill>
-                <a:latin typeface="Times New Roman" panose="02020603050405020304" pitchFamily="18" charset="0"/>
-                <a:cs typeface="Times New Roman" panose="02020603050405020304" pitchFamily="18" charset="0"/>
-              </a:rPr>
-              <a:t>Protected</a:t>
-            </a:r>
-            <a:endParaRPr lang="pt-BR" sz="2400" dirty="0">
+              <a:rPr lang="pt-BR" sz="2400" b="1" dirty="0" err="1">
+                <a:solidFill>
+                  <a:srgbClr val="FF0000"/>
+                </a:solidFill>
+                <a:latin typeface="Times New Roman" panose="02020603050405020304" pitchFamily="18" charset="0"/>
+                <a:cs typeface="Times New Roman" panose="02020603050405020304" pitchFamily="18" charset="0"/>
+              </a:rPr>
+              <a:t>public</a:t>
+            </a:r>
+            <a:r>
+              <a:rPr lang="pt-BR" sz="2400" b="1" dirty="0">
+                <a:solidFill>
+                  <a:srgbClr val="FF0000"/>
+                </a:solidFill>
+                <a:latin typeface="Times New Roman" panose="02020603050405020304" pitchFamily="18" charset="0"/>
+                <a:cs typeface="Times New Roman" panose="02020603050405020304" pitchFamily="18" charset="0"/>
+              </a:rPr>
+              <a:t>; </a:t>
+            </a:r>
+            <a:r>
+              <a:rPr lang="pt-BR" sz="2400" b="1" dirty="0" err="1">
+                <a:solidFill>
+                  <a:srgbClr val="FF0000"/>
+                </a:solidFill>
+                <a:latin typeface="Times New Roman" panose="02020603050405020304" pitchFamily="18" charset="0"/>
+                <a:cs typeface="Times New Roman" panose="02020603050405020304" pitchFamily="18" charset="0"/>
+              </a:rPr>
+              <a:t>private</a:t>
+            </a:r>
+            <a:r>
+              <a:rPr lang="pt-BR" sz="2400" b="1" dirty="0">
+                <a:solidFill>
+                  <a:srgbClr val="FF0000"/>
+                </a:solidFill>
+                <a:latin typeface="Times New Roman" panose="02020603050405020304" pitchFamily="18" charset="0"/>
+                <a:cs typeface="Times New Roman" panose="02020603050405020304" pitchFamily="18" charset="0"/>
+              </a:rPr>
+              <a:t>; </a:t>
+            </a:r>
+            <a:r>
+              <a:rPr lang="pt-BR" sz="2400" b="1" dirty="0" err="1">
+                <a:solidFill>
+                  <a:srgbClr val="FF0000"/>
+                </a:solidFill>
+                <a:latin typeface="Times New Roman" panose="02020603050405020304" pitchFamily="18" charset="0"/>
+                <a:cs typeface="Times New Roman" panose="02020603050405020304" pitchFamily="18" charset="0"/>
+              </a:rPr>
+              <a:t>protected</a:t>
+            </a:r>
+            <a:endParaRPr lang="pt-BR" sz="2400" b="1" dirty="0">
+              <a:solidFill>
+                <a:srgbClr val="FF0000"/>
+              </a:solidFill>
+              <a:latin typeface="Times New Roman" panose="02020603050405020304" pitchFamily="18" charset="0"/>
+              <a:cs typeface="Times New Roman" panose="02020603050405020304" pitchFamily="18" charset="0"/>
+            </a:endParaRPr>
+          </a:p>
+          <a:p>
+            <a:pPr algn="just">
+              <a:buFont typeface="Wingdings" panose="05000000000000000000" pitchFamily="2" charset="2"/>
+              <a:buChar char="§"/>
+            </a:pPr>
+            <a:r>
+              <a:rPr lang="pt-BR" sz="2400" b="1" dirty="0" err="1">
+                <a:solidFill>
+                  <a:schemeClr val="tx1"/>
+                </a:solidFill>
+                <a:latin typeface="Times New Roman" panose="02020603050405020304" pitchFamily="18" charset="0"/>
+                <a:cs typeface="Times New Roman" panose="02020603050405020304" pitchFamily="18" charset="0"/>
+              </a:rPr>
+              <a:t>Object</a:t>
+            </a:r>
+            <a:endParaRPr lang="pt-BR" sz="2400" b="1" dirty="0">
               <a:solidFill>
                 <a:schemeClr val="tx1"/>
               </a:solidFill>
@@ -4584,18 +4627,78 @@
               <a:buChar char="§"/>
             </a:pPr>
             <a:r>
-              <a:rPr lang="pt-BR" sz="2400" dirty="0" err="1">
-                <a:solidFill>
-                  <a:schemeClr val="tx1"/>
-                </a:solidFill>
-                <a:latin typeface="Times New Roman" panose="02020603050405020304" pitchFamily="18" charset="0"/>
-                <a:cs typeface="Times New Roman" panose="02020603050405020304" pitchFamily="18" charset="0"/>
-              </a:rPr>
-              <a:t>Object</a:t>
-            </a:r>
-            <a:endParaRPr lang="pt-BR" sz="2400" dirty="0">
+              <a:rPr lang="pt-BR" sz="2400" b="1" dirty="0">
+                <a:solidFill>
+                  <a:schemeClr val="tx1"/>
+                </a:solidFill>
+                <a:latin typeface="Times New Roman" panose="02020603050405020304" pitchFamily="18" charset="0"/>
+                <a:cs typeface="Times New Roman" panose="02020603050405020304" pitchFamily="18" charset="0"/>
+              </a:rPr>
+              <a:t>Herança</a:t>
+            </a:r>
+            <a:r>
+              <a:rPr lang="pt-BR" sz="2400" dirty="0">
+                <a:solidFill>
+                  <a:schemeClr val="tx1"/>
+                </a:solidFill>
+                <a:latin typeface="Times New Roman" panose="02020603050405020304" pitchFamily="18" charset="0"/>
+                <a:cs typeface="Times New Roman" panose="02020603050405020304" pitchFamily="18" charset="0"/>
+              </a:rPr>
+              <a:t> – </a:t>
+            </a:r>
+            <a:r>
+              <a:rPr lang="pt-BR" sz="2400" b="1" dirty="0" err="1">
+                <a:solidFill>
+                  <a:srgbClr val="FF0000"/>
+                </a:solidFill>
+                <a:latin typeface="Times New Roman" panose="02020603050405020304" pitchFamily="18" charset="0"/>
+                <a:cs typeface="Times New Roman" panose="02020603050405020304" pitchFamily="18" charset="0"/>
+              </a:rPr>
+              <a:t>extends</a:t>
+            </a:r>
+            <a:r>
+              <a:rPr lang="pt-BR" sz="2400" b="1" dirty="0">
+                <a:solidFill>
+                  <a:srgbClr val="FF0000"/>
+                </a:solidFill>
+                <a:latin typeface="Times New Roman" panose="02020603050405020304" pitchFamily="18" charset="0"/>
+                <a:cs typeface="Times New Roman" panose="02020603050405020304" pitchFamily="18" charset="0"/>
+              </a:rPr>
+              <a:t>; </a:t>
+            </a:r>
+            <a:r>
+              <a:rPr lang="pt-BR" sz="2400" b="1" dirty="0">
+                <a:solidFill>
+                  <a:schemeClr val="tx1"/>
+                </a:solidFill>
+                <a:latin typeface="Times New Roman" panose="02020603050405020304" pitchFamily="18" charset="0"/>
+                <a:cs typeface="Times New Roman" panose="02020603050405020304" pitchFamily="18" charset="0"/>
+              </a:rPr>
+              <a:t>Interface</a:t>
+            </a:r>
+            <a:r>
+              <a:rPr lang="pt-BR" sz="2400" dirty="0">
+                <a:solidFill>
+                  <a:schemeClr val="tx1"/>
+                </a:solidFill>
+                <a:latin typeface="Times New Roman" panose="02020603050405020304" pitchFamily="18" charset="0"/>
+                <a:cs typeface="Times New Roman" panose="02020603050405020304" pitchFamily="18" charset="0"/>
+              </a:rPr>
+              <a:t> - </a:t>
+            </a:r>
+            <a:r>
+              <a:rPr lang="pt-BR" sz="2400" b="1" dirty="0" err="1">
+                <a:solidFill>
+                  <a:srgbClr val="FF0000"/>
+                </a:solidFill>
+                <a:latin typeface="Times New Roman" panose="02020603050405020304" pitchFamily="18" charset="0"/>
+                <a:cs typeface="Times New Roman" panose="02020603050405020304" pitchFamily="18" charset="0"/>
+              </a:rPr>
+              <a:t>implements</a:t>
+            </a:r>
+            <a:endParaRPr lang="pt-BR" sz="2400" b="1" dirty="0">
               <a:solidFill>
-                <a:schemeClr val="tx1"/>
+                <a:srgbClr val="FF0000"/>
               </a:solidFill>
               <a:latin typeface="Times New Roman" panose="02020603050405020304" pitchFamily="18" charset="0"/>
               <a:cs typeface="Times New Roman" panose="02020603050405020304" pitchFamily="18" charset="0"/>
@@ -4607,28 +4710,68 @@
               <a:buChar char="§"/>
             </a:pPr>
             <a:r>
-              <a:rPr lang="pt-BR" sz="2400" dirty="0">
-                <a:solidFill>
-                  <a:schemeClr val="tx1"/>
-                </a:solidFill>
-                <a:latin typeface="Times New Roman" panose="02020603050405020304" pitchFamily="18" charset="0"/>
-                <a:cs typeface="Times New Roman" panose="02020603050405020304" pitchFamily="18" charset="0"/>
-              </a:rPr>
-              <a:t>Herança / </a:t>
-            </a:r>
-            <a:r>
-              <a:rPr lang="pt-BR" sz="2400" dirty="0" err="1">
-                <a:solidFill>
-                  <a:schemeClr val="tx1"/>
-                </a:solidFill>
-                <a:latin typeface="Times New Roman" panose="02020603050405020304" pitchFamily="18" charset="0"/>
-                <a:cs typeface="Times New Roman" panose="02020603050405020304" pitchFamily="18" charset="0"/>
-              </a:rPr>
-              <a:t>Extends</a:t>
-            </a:r>
-            <a:endParaRPr lang="pt-BR" sz="2400" dirty="0">
+              <a:rPr lang="pt-BR" sz="2400" b="1" dirty="0">
+                <a:solidFill>
+                  <a:schemeClr val="tx1"/>
+                </a:solidFill>
+                <a:latin typeface="Times New Roman" panose="02020603050405020304" pitchFamily="18" charset="0"/>
+                <a:cs typeface="Times New Roman" panose="02020603050405020304" pitchFamily="18" charset="0"/>
+              </a:rPr>
+              <a:t>Encapsulamento – </a:t>
+            </a:r>
+            <a:r>
+              <a:rPr lang="pt-BR" sz="2400" b="1" dirty="0" err="1">
+                <a:solidFill>
+                  <a:srgbClr val="FF0000"/>
+                </a:solidFill>
+                <a:latin typeface="Times New Roman" panose="02020603050405020304" pitchFamily="18" charset="0"/>
+                <a:cs typeface="Times New Roman" panose="02020603050405020304" pitchFamily="18" charset="0"/>
+              </a:rPr>
+              <a:t>private</a:t>
+            </a:r>
+            <a:r>
+              <a:rPr lang="pt-BR" sz="2400" b="1" dirty="0">
+                <a:solidFill>
+                  <a:srgbClr val="FF0000"/>
+                </a:solidFill>
+                <a:latin typeface="Times New Roman" panose="02020603050405020304" pitchFamily="18" charset="0"/>
+                <a:cs typeface="Times New Roman" panose="02020603050405020304" pitchFamily="18" charset="0"/>
+              </a:rPr>
+              <a:t>; </a:t>
+            </a:r>
+            <a:r>
+              <a:rPr lang="pt-BR" sz="2400" b="1" dirty="0" err="1">
+                <a:solidFill>
+                  <a:srgbClr val="FF0000"/>
+                </a:solidFill>
+                <a:latin typeface="Times New Roman" panose="02020603050405020304" pitchFamily="18" charset="0"/>
+                <a:cs typeface="Times New Roman" panose="02020603050405020304" pitchFamily="18" charset="0"/>
+              </a:rPr>
+              <a:t>public</a:t>
+            </a:r>
+            <a:r>
+              <a:rPr lang="pt-BR" sz="2400" b="1" dirty="0">
+                <a:solidFill>
+                  <a:srgbClr val="FF0000"/>
+                </a:solidFill>
+                <a:latin typeface="Times New Roman" panose="02020603050405020304" pitchFamily="18" charset="0"/>
+                <a:cs typeface="Times New Roman" panose="02020603050405020304" pitchFamily="18" charset="0"/>
+              </a:rPr>
+              <a:t>; </a:t>
+            </a:r>
+            <a:r>
+              <a:rPr lang="pt-BR" sz="2400" b="1" dirty="0" err="1">
+                <a:solidFill>
+                  <a:srgbClr val="FF0000"/>
+                </a:solidFill>
+                <a:latin typeface="Times New Roman" panose="02020603050405020304" pitchFamily="18" charset="0"/>
+                <a:cs typeface="Times New Roman" panose="02020603050405020304" pitchFamily="18" charset="0"/>
+              </a:rPr>
+              <a:t>protected</a:t>
+            </a:r>
+            <a:endParaRPr lang="pt-BR" sz="2400" b="1" dirty="0">
               <a:solidFill>
-                <a:schemeClr val="tx1"/>
+                <a:srgbClr val="FF0000"/>
               </a:solidFill>
               <a:latin typeface="Times New Roman" panose="02020603050405020304" pitchFamily="18" charset="0"/>
               <a:cs typeface="Times New Roman" panose="02020603050405020304" pitchFamily="18" charset="0"/>
@@ -4640,31 +4783,52 @@
               <a:buChar char="§"/>
             </a:pPr>
             <a:r>
-              <a:rPr lang="pt-BR" sz="2400" dirty="0">
-                <a:solidFill>
-                  <a:schemeClr val="tx1"/>
-                </a:solidFill>
-                <a:latin typeface="Times New Roman" panose="02020603050405020304" pitchFamily="18" charset="0"/>
-                <a:cs typeface="Times New Roman" panose="02020603050405020304" pitchFamily="18" charset="0"/>
-              </a:rPr>
-              <a:t>Encapsulamento</a:t>
-            </a:r>
-          </a:p>
-          <a:p>
-            <a:pPr algn="just">
-              <a:buFont typeface="Wingdings" panose="05000000000000000000" pitchFamily="2" charset="2"/>
-              <a:buChar char="§"/>
-            </a:pPr>
-            <a:r>
-              <a:rPr lang="pt-BR" sz="2400" dirty="0">
-                <a:solidFill>
-                  <a:schemeClr val="tx1"/>
-                </a:solidFill>
-                <a:latin typeface="Times New Roman" panose="02020603050405020304" pitchFamily="18" charset="0"/>
-                <a:cs typeface="Times New Roman" panose="02020603050405020304" pitchFamily="18" charset="0"/>
-              </a:rPr>
-              <a:t>Polimorfismo</a:t>
-            </a:r>
+              <a:rPr lang="pt-BR" sz="2400" b="1" dirty="0">
+                <a:solidFill>
+                  <a:schemeClr val="tx1"/>
+                </a:solidFill>
+                <a:latin typeface="Times New Roman" panose="02020603050405020304" pitchFamily="18" charset="0"/>
+                <a:cs typeface="Times New Roman" panose="02020603050405020304" pitchFamily="18" charset="0"/>
+              </a:rPr>
+              <a:t>Polimorfismo – </a:t>
+            </a:r>
+            <a:r>
+              <a:rPr lang="pt-BR" sz="2400" b="1" dirty="0" err="1">
+                <a:solidFill>
+                  <a:srgbClr val="FF0000"/>
+                </a:solidFill>
+                <a:latin typeface="Times New Roman" panose="02020603050405020304" pitchFamily="18" charset="0"/>
+                <a:cs typeface="Times New Roman" panose="02020603050405020304" pitchFamily="18" charset="0"/>
+              </a:rPr>
+              <a:t>override</a:t>
+            </a:r>
+            <a:r>
+              <a:rPr lang="pt-BR" sz="2400" b="1" dirty="0">
+                <a:solidFill>
+                  <a:srgbClr val="FF0000"/>
+                </a:solidFill>
+                <a:latin typeface="Times New Roman" panose="02020603050405020304" pitchFamily="18" charset="0"/>
+                <a:cs typeface="Times New Roman" panose="02020603050405020304" pitchFamily="18" charset="0"/>
+              </a:rPr>
+              <a:t>; </a:t>
+            </a:r>
+            <a:r>
+              <a:rPr lang="pt-BR" sz="2400" b="1" dirty="0" err="1">
+                <a:solidFill>
+                  <a:srgbClr val="FF0000"/>
+                </a:solidFill>
+                <a:latin typeface="Times New Roman" panose="02020603050405020304" pitchFamily="18" charset="0"/>
+                <a:cs typeface="Times New Roman" panose="02020603050405020304" pitchFamily="18" charset="0"/>
+              </a:rPr>
+              <a:t>overload</a:t>
+            </a:r>
+            <a:endParaRPr lang="pt-BR" sz="2400" b="1" dirty="0">
+              <a:solidFill>
+                <a:srgbClr val="FF0000"/>
+              </a:solidFill>
+              <a:latin typeface="Times New Roman" panose="02020603050405020304" pitchFamily="18" charset="0"/>
+              <a:cs typeface="Times New Roman" panose="02020603050405020304" pitchFamily="18" charset="0"/>
+            </a:endParaRPr>
           </a:p>
         </p:txBody>
       </p:sp>
@@ -5073,7 +5237,7 @@
               <a:t> (do inglês </a:t>
             </a:r>
             <a:r>
-              <a:rPr lang="pt-BR" sz="2400" dirty="0" err="1">
+              <a:rPr lang="pt-BR" sz="2400" b="1" dirty="0" err="1">
                 <a:solidFill>
                   <a:schemeClr val="tx1"/>
                 </a:solidFill>
@@ -5083,7 +5247,7 @@
               <a:t>Unified</a:t>
             </a:r>
             <a:r>
-              <a:rPr lang="pt-BR" sz="2400" dirty="0">
+              <a:rPr lang="pt-BR" sz="2400" b="1" dirty="0">
                 <a:solidFill>
                   <a:schemeClr val="tx1"/>
                 </a:solidFill>
@@ -5093,7 +5257,7 @@
               <a:t> </a:t>
             </a:r>
             <a:r>
-              <a:rPr lang="pt-BR" sz="2400" dirty="0" err="1">
+              <a:rPr lang="pt-BR" sz="2400" b="1" dirty="0" err="1">
                 <a:solidFill>
                   <a:schemeClr val="tx1"/>
                 </a:solidFill>
@@ -5103,7 +5267,7 @@
               <a:t>Modeling</a:t>
             </a:r>
             <a:r>
-              <a:rPr lang="pt-BR" sz="2400" dirty="0">
+              <a:rPr lang="pt-BR" sz="2400" b="1" dirty="0">
                 <a:solidFill>
                   <a:schemeClr val="tx1"/>
                 </a:solidFill>
@@ -5113,7 +5277,7 @@
               <a:t> </a:t>
             </a:r>
             <a:r>
-              <a:rPr lang="pt-BR" sz="2400" dirty="0" err="1">
+              <a:rPr lang="pt-BR" sz="2400" b="1" dirty="0" err="1">
                 <a:solidFill>
                   <a:schemeClr val="tx1"/>
                 </a:solidFill>
@@ -5202,7 +5366,7 @@
                 <a:latin typeface="Times New Roman" panose="02020603050405020304" pitchFamily="18" charset="0"/>
                 <a:cs typeface="Times New Roman" panose="02020603050405020304" pitchFamily="18" charset="0"/>
               </a:rPr>
-              <a:t>Diagrama de componentes / Diagrama de Implantação</a:t>
+              <a:t>Diagrama de Componentes / Diagrama de Implantação</a:t>
             </a:r>
           </a:p>
           <a:p>
@@ -5218,8 +5382,25 @@
                 <a:latin typeface="Times New Roman" panose="02020603050405020304" pitchFamily="18" charset="0"/>
                 <a:cs typeface="Times New Roman" panose="02020603050405020304" pitchFamily="18" charset="0"/>
               </a:rPr>
-              <a:t>Diagrama de objetos / Diagrama do pacote</a:t>
-            </a:r>
+              <a:t>Diagrama de Objetos / Diagrama </a:t>
+            </a:r>
+            <a:r>
+              <a:rPr lang="pt-BR" sz="2400">
+                <a:solidFill>
+                  <a:schemeClr val="tx1"/>
+                </a:solidFill>
+                <a:latin typeface="Times New Roman" panose="02020603050405020304" pitchFamily="18" charset="0"/>
+                <a:cs typeface="Times New Roman" panose="02020603050405020304" pitchFamily="18" charset="0"/>
+              </a:rPr>
+              <a:t>do Pacote</a:t>
+            </a:r>
+            <a:endParaRPr lang="pt-BR" sz="2400" dirty="0">
+              <a:solidFill>
+                <a:schemeClr val="tx1"/>
+              </a:solidFill>
+              <a:latin typeface="Times New Roman" panose="02020603050405020304" pitchFamily="18" charset="0"/>
+              <a:cs typeface="Times New Roman" panose="02020603050405020304" pitchFamily="18" charset="0"/>
+            </a:endParaRPr>
           </a:p>
           <a:p>
             <a:pPr algn="just">
@@ -7750,6 +7931,16 @@
                 <a:cs typeface="Times New Roman" panose="02020603050405020304" pitchFamily="18" charset="0"/>
               </a:rPr>
               <a:t>offs</a:t>
+            </a:r>
+            <a:r>
+              <a:rPr lang="pt-BR" sz="2400" b="1">
+                <a:solidFill>
+                  <a:srgbClr val="FF0000"/>
+                </a:solidFill>
+                <a:latin typeface="Times New Roman" panose="02020603050405020304" pitchFamily="18" charset="0"/>
+                <a:cs typeface="Times New Roman" panose="02020603050405020304" pitchFamily="18" charset="0"/>
+              </a:rPr>
+              <a:t> </a:t>
             </a:r>
             <a:endParaRPr lang="pt-BR" sz="2400" b="1" dirty="0">
               <a:solidFill>
